--- a/Chapter01/Introduction.pptx
+++ b/Chapter01/Introduction.pptx
@@ -5,38 +5,39 @@
     <p:sldMasterId id="2147483661" r:id="rId1"/>
   </p:sldMasterIdLst>
   <p:notesMasterIdLst>
-    <p:notesMasterId r:id="rId7"/>
+    <p:notesMasterId r:id="rId8"/>
   </p:notesMasterIdLst>
   <p:sldIdLst>
     <p:sldId id="256" r:id="rId2"/>
     <p:sldId id="284" r:id="rId3"/>
     <p:sldId id="285" r:id="rId4"/>
     <p:sldId id="264" r:id="rId5"/>
-    <p:sldId id="259" r:id="rId6"/>
+    <p:sldId id="286" r:id="rId6"/>
+    <p:sldId id="259" r:id="rId7"/>
   </p:sldIdLst>
   <p:sldSz cx="9144000" cy="5143500" type="screen16x9"/>
   <p:notesSz cx="6858000" cy="9144000"/>
   <p:embeddedFontLst>
     <p:embeddedFont>
       <p:font typeface="Calibri" panose="020F0502020204030204" pitchFamily="34" charset="0"/>
-      <p:regular r:id="rId8"/>
-      <p:bold r:id="rId9"/>
-      <p:italic r:id="rId10"/>
-      <p:boldItalic r:id="rId11"/>
+      <p:regular r:id="rId9"/>
+      <p:bold r:id="rId10"/>
+      <p:italic r:id="rId11"/>
+      <p:boldItalic r:id="rId12"/>
     </p:embeddedFont>
     <p:embeddedFont>
       <p:font typeface="Georgia" panose="02040502050405020303" pitchFamily="18" charset="0"/>
-      <p:regular r:id="rId12"/>
-      <p:bold r:id="rId13"/>
-      <p:italic r:id="rId14"/>
-      <p:boldItalic r:id="rId15"/>
+      <p:regular r:id="rId13"/>
+      <p:bold r:id="rId14"/>
+      <p:italic r:id="rId15"/>
+      <p:boldItalic r:id="rId16"/>
     </p:embeddedFont>
     <p:embeddedFont>
       <p:font typeface="Nunito Sans" pitchFamily="2" charset="0"/>
-      <p:regular r:id="rId16"/>
-      <p:bold r:id="rId17"/>
-      <p:italic r:id="rId18"/>
-      <p:boldItalic r:id="rId19"/>
+      <p:regular r:id="rId17"/>
+      <p:bold r:id="rId18"/>
+      <p:italic r:id="rId19"/>
+      <p:boldItalic r:id="rId20"/>
     </p:embeddedFont>
   </p:embeddedFontLst>
   <p:defaultTextStyle>
@@ -1142,6 +1143,115 @@
 </file>
 
 <file path=ppt/notesSlides/notesSlide5.xml><?xml version="1.0" encoding="utf-8"?>
+<p:notes xmlns:a="http://schemas.openxmlformats.org/drawingml/2006/main" xmlns:r="http://schemas.openxmlformats.org/officeDocument/2006/relationships" xmlns:p="http://schemas.openxmlformats.org/presentationml/2006/main" showMasterSp="0" showMasterPhAnim="0">
+  <p:cSld>
+    <p:spTree>
+      <p:nvGrpSpPr>
+        <p:cNvPr id="1" name="Shape 117"/>
+        <p:cNvGrpSpPr/>
+        <p:nvPr/>
+      </p:nvGrpSpPr>
+      <p:grpSpPr>
+        <a:xfrm>
+          <a:off x="0" y="0"/>
+          <a:ext cx="0" cy="0"/>
+          <a:chOff x="0" y="0"/>
+          <a:chExt cx="0" cy="0"/>
+        </a:xfrm>
+      </p:grpSpPr>
+      <p:sp>
+        <p:nvSpPr>
+          <p:cNvPr id="118" name="Shape 118"/>
+          <p:cNvSpPr>
+            <a:spLocks noGrp="1" noRot="1" noChangeAspect="1"/>
+          </p:cNvSpPr>
+          <p:nvPr>
+            <p:ph type="sldImg" idx="2"/>
+          </p:nvPr>
+        </p:nvSpPr>
+        <p:spPr>
+          <a:xfrm>
+            <a:off x="381000" y="685800"/>
+            <a:ext cx="6096000" cy="3429000"/>
+          </a:xfrm>
+          <a:custGeom>
+            <a:avLst/>
+            <a:gdLst/>
+            <a:ahLst/>
+            <a:cxnLst/>
+            <a:rect l="0" t="0" r="0" b="0"/>
+            <a:pathLst>
+              <a:path w="120000" h="120000" extrusionOk="0">
+                <a:moveTo>
+                  <a:pt x="0" y="0"/>
+                </a:moveTo>
+                <a:lnTo>
+                  <a:pt x="120000" y="0"/>
+                </a:lnTo>
+                <a:lnTo>
+                  <a:pt x="120000" y="120000"/>
+                </a:lnTo>
+                <a:lnTo>
+                  <a:pt x="0" y="120000"/>
+                </a:lnTo>
+                <a:close/>
+              </a:path>
+            </a:pathLst>
+          </a:custGeom>
+        </p:spPr>
+      </p:sp>
+      <p:sp>
+        <p:nvSpPr>
+          <p:cNvPr id="119" name="Shape 119"/>
+          <p:cNvSpPr txBox="1">
+            <a:spLocks noGrp="1"/>
+          </p:cNvSpPr>
+          <p:nvPr>
+            <p:ph type="body" idx="1"/>
+          </p:nvPr>
+        </p:nvSpPr>
+        <p:spPr>
+          <a:xfrm>
+            <a:off x="685800" y="4343400"/>
+            <a:ext cx="5486400" cy="4114800"/>
+          </a:xfrm>
+          <a:prstGeom prst="rect">
+            <a:avLst/>
+          </a:prstGeom>
+        </p:spPr>
+        <p:txBody>
+          <a:bodyPr spcFirstLastPara="1" wrap="square" lIns="91425" tIns="91425" rIns="91425" bIns="91425" anchor="t" anchorCtr="0">
+            <a:noAutofit/>
+          </a:bodyPr>
+          <a:lstStyle/>
+          <a:p>
+            <a:pPr marL="0" lvl="0" indent="0">
+              <a:spcBef>
+                <a:spcPts val="0"/>
+              </a:spcBef>
+              <a:spcAft>
+                <a:spcPts val="0"/>
+              </a:spcAft>
+              <a:buNone/>
+            </a:pPr>
+            <a:endParaRPr/>
+          </a:p>
+        </p:txBody>
+      </p:sp>
+    </p:spTree>
+    <p:extLst>
+      <p:ext uri="{BB962C8B-B14F-4D97-AF65-F5344CB8AC3E}">
+        <p14:creationId xmlns:p14="http://schemas.microsoft.com/office/powerpoint/2010/main" val="1024805818"/>
+      </p:ext>
+    </p:extLst>
+  </p:cSld>
+  <p:clrMapOvr>
+    <a:masterClrMapping/>
+  </p:clrMapOvr>
+</p:notes>
+</file>
+
+<file path=ppt/notesSlides/notesSlide6.xml><?xml version="1.0" encoding="utf-8"?>
 <p:notes xmlns:a="http://schemas.openxmlformats.org/drawingml/2006/main" xmlns:r="http://schemas.openxmlformats.org/officeDocument/2006/relationships" xmlns:p="http://schemas.openxmlformats.org/presentationml/2006/main" showMasterSp="0" showMasterPhAnim="0">
   <p:cSld>
     <p:spTree>
@@ -12919,6 +13029,194 @@
             </a:pPr>
             <a:r>
               <a:rPr lang="de-DE" dirty="0"/>
+              <a:t>Was müsst ihr mitbringen?</a:t>
+            </a:r>
+            <a:endParaRPr dirty="0"/>
+          </a:p>
+        </p:txBody>
+      </p:sp>
+      <p:sp>
+        <p:nvSpPr>
+          <p:cNvPr id="122" name="Shape 122"/>
+          <p:cNvSpPr txBox="1">
+            <a:spLocks noGrp="1"/>
+          </p:cNvSpPr>
+          <p:nvPr>
+            <p:ph type="body" idx="2"/>
+          </p:nvPr>
+        </p:nvSpPr>
+        <p:spPr>
+          <a:xfrm>
+            <a:off x="4950342" y="751645"/>
+            <a:ext cx="3819811" cy="3099900"/>
+          </a:xfrm>
+          <a:prstGeom prst="rect">
+            <a:avLst/>
+          </a:prstGeom>
+        </p:spPr>
+        <p:txBody>
+          <a:bodyPr spcFirstLastPara="1" wrap="square" lIns="91425" tIns="91425" rIns="91425" bIns="91425" anchor="t" anchorCtr="0">
+            <a:noAutofit/>
+          </a:bodyPr>
+          <a:lstStyle/>
+          <a:p>
+            <a:pPr lvl="0" rtl="0">
+              <a:spcBef>
+                <a:spcPts val="0"/>
+              </a:spcBef>
+              <a:spcAft>
+                <a:spcPts val="0"/>
+              </a:spcAft>
+              <a:buSzPts val="1800"/>
+              <a:buFont typeface="Arial" panose="020B0604020202020204" pitchFamily="34" charset="0"/>
+              <a:buChar char="•"/>
+            </a:pPr>
+            <a:r>
+              <a:rPr lang="de-DE" dirty="0"/>
+              <a:t>Erfahrung in einer Programmiersprache</a:t>
+            </a:r>
+          </a:p>
+          <a:p>
+            <a:pPr lvl="1">
+              <a:spcBef>
+                <a:spcPts val="0"/>
+              </a:spcBef>
+              <a:buSzPts val="1800"/>
+              <a:buFont typeface="Arial" panose="020B0604020202020204" pitchFamily="34" charset="0"/>
+              <a:buChar char="•"/>
+            </a:pPr>
+            <a:r>
+              <a:rPr lang="de-DE" dirty="0"/>
+              <a:t>C, C++, Java, C#, Python etc.</a:t>
+            </a:r>
+          </a:p>
+          <a:p>
+            <a:pPr>
+              <a:buFont typeface="Arial" panose="020B0604020202020204" pitchFamily="34" charset="0"/>
+              <a:buChar char="•"/>
+            </a:pPr>
+            <a:endParaRPr lang="de-DE" dirty="0"/>
+          </a:p>
+          <a:p>
+            <a:pPr>
+              <a:buFont typeface="Arial" panose="020B0604020202020204" pitchFamily="34" charset="0"/>
+              <a:buChar char="•"/>
+            </a:pPr>
+            <a:r>
+              <a:rPr lang="de-DE" dirty="0"/>
+              <a:t>Grunderfahrung mit dem Terminal</a:t>
+            </a:r>
+          </a:p>
+        </p:txBody>
+      </p:sp>
+      <p:sp>
+        <p:nvSpPr>
+          <p:cNvPr id="123" name="Shape 123"/>
+          <p:cNvSpPr txBox="1">
+            <a:spLocks noGrp="1"/>
+          </p:cNvSpPr>
+          <p:nvPr>
+            <p:ph type="sldNum" idx="12"/>
+          </p:nvPr>
+        </p:nvSpPr>
+        <p:spPr>
+          <a:xfrm>
+            <a:off x="8556784" y="4749851"/>
+            <a:ext cx="548700" cy="393600"/>
+          </a:xfrm>
+          <a:prstGeom prst="rect">
+            <a:avLst/>
+          </a:prstGeom>
+        </p:spPr>
+        <p:txBody>
+          <a:bodyPr spcFirstLastPara="1" wrap="square" lIns="91425" tIns="91425" rIns="91425" bIns="91425" anchor="ctr" anchorCtr="0">
+            <a:noAutofit/>
+          </a:bodyPr>
+          <a:lstStyle/>
+          <a:p>
+            <a:pPr marL="0" lvl="0" indent="0">
+              <a:spcBef>
+                <a:spcPts val="0"/>
+              </a:spcBef>
+              <a:spcAft>
+                <a:spcPts val="0"/>
+              </a:spcAft>
+              <a:buNone/>
+            </a:pPr>
+            <a:fld id="{00000000-1234-1234-1234-123412341234}" type="slidenum">
+              <a:rPr lang="en"/>
+              <a:t>5</a:t>
+            </a:fld>
+            <a:endParaRPr/>
+          </a:p>
+        </p:txBody>
+      </p:sp>
+    </p:spTree>
+    <p:extLst>
+      <p:ext uri="{BB962C8B-B14F-4D97-AF65-F5344CB8AC3E}">
+        <p14:creationId xmlns:p14="http://schemas.microsoft.com/office/powerpoint/2010/main" val="1006646808"/>
+      </p:ext>
+    </p:extLst>
+  </p:cSld>
+  <p:clrMapOvr>
+    <a:masterClrMapping/>
+  </p:clrMapOvr>
+</p:sld>
+</file>
+
+<file path=ppt/slides/slide6.xml><?xml version="1.0" encoding="utf-8"?>
+<p:sld xmlns:a="http://schemas.openxmlformats.org/drawingml/2006/main" xmlns:r="http://schemas.openxmlformats.org/officeDocument/2006/relationships" xmlns:p="http://schemas.openxmlformats.org/presentationml/2006/main">
+  <p:cSld>
+    <p:spTree>
+      <p:nvGrpSpPr>
+        <p:cNvPr id="1" name="Shape 120"/>
+        <p:cNvGrpSpPr/>
+        <p:nvPr/>
+      </p:nvGrpSpPr>
+      <p:grpSpPr>
+        <a:xfrm>
+          <a:off x="0" y="0"/>
+          <a:ext cx="0" cy="0"/>
+          <a:chOff x="0" y="0"/>
+          <a:chExt cx="0" cy="0"/>
+        </a:xfrm>
+      </p:grpSpPr>
+      <p:sp>
+        <p:nvSpPr>
+          <p:cNvPr id="121" name="Shape 121"/>
+          <p:cNvSpPr txBox="1">
+            <a:spLocks noGrp="1"/>
+          </p:cNvSpPr>
+          <p:nvPr>
+            <p:ph type="title"/>
+          </p:nvPr>
+        </p:nvSpPr>
+        <p:spPr>
+          <a:xfrm>
+            <a:off x="646573" y="1016000"/>
+            <a:ext cx="3246900" cy="973500"/>
+          </a:xfrm>
+          <a:prstGeom prst="rect">
+            <a:avLst/>
+          </a:prstGeom>
+        </p:spPr>
+        <p:txBody>
+          <a:bodyPr spcFirstLastPara="1" wrap="square" lIns="91425" tIns="91425" rIns="91425" bIns="91425" anchor="t" anchorCtr="0">
+            <a:noAutofit/>
+          </a:bodyPr>
+          <a:lstStyle/>
+          <a:p>
+            <a:pPr marL="0" lvl="0" indent="0">
+              <a:spcBef>
+                <a:spcPts val="0"/>
+              </a:spcBef>
+              <a:spcAft>
+                <a:spcPts val="0"/>
+              </a:spcAft>
+              <a:buNone/>
+            </a:pPr>
+            <a:r>
+              <a:rPr lang="de-DE" dirty="0"/>
               <a:t>Kursgliederung</a:t>
             </a:r>
             <a:endParaRPr dirty="0"/>
@@ -13127,7 +13425,7 @@
             </a:pPr>
             <a:fld id="{00000000-1234-1234-1234-123412341234}" type="slidenum">
               <a:rPr lang="en"/>
-              <a:t>5</a:t>
+              <a:t>6</a:t>
             </a:fld>
             <a:endParaRPr/>
           </a:p>
